--- a/exports/pptx/lessons/primary-module-08-yoga/day-08-project-1.pptx
+++ b/exports/pptx/lessons/primary-module-08-yoga/day-08-project-1.pptx
@@ -15,9 +15,10 @@
     <p:sldId id="263" r:id="rId9"/>
     <p:sldId id="264" r:id="rId10"/>
     <p:sldId id="265" r:id="rId11"/>
+    <p:sldId id="266" r:id="rId12"/>
   </p:sldIdLst>
   <p:notesMasterIdLst>
-    <p:notesMasterId r:id="rId12"/>
+    <p:notesMasterId r:id="rId13"/>
   </p:notesMasterIdLst>
   <p:sldSz cx="9144000" cy="5143500"/>
   <p:notesSz cx="5143500" cy="9144000"/>
@@ -623,6 +624,94 @@
             <a:fld id="{F7021451-1387-4CA6-816F-3879F97B5CBC}" type="slidenum">
               <a:rPr lang="en-US"/>
               <a:t>10</a:t>
+            </a:fld>
+            <a:endParaRPr lang="en-US"/>
+          </a:p>
+        </p:txBody>
+      </p:sp>
+    </p:spTree>
+    <p:extLst>
+      <p:ext uri="{BB962C8B-B14F-4D97-AF65-F5344CB8AC3E}">
+        <p14:creationId xmlns:p14="http://schemas.microsoft.com/office/powerpoint/2010/main" val="1024086991"/>
+      </p:ext>
+    </p:extLst>
+  </p:cSld>
+  <p:clrMapOvr>
+    <a:masterClrMapping/>
+  </p:clrMapOvr>
+</p:notes>
+</file>
+
+<file path=ppt/notesSlides/notesSlide11.xml><?xml version="1.0" encoding="utf-8"?>
+<p:notes xmlns:a="http://schemas.openxmlformats.org/drawingml/2006/main" xmlns:r="http://schemas.openxmlformats.org/officeDocument/2006/relationships" xmlns:p="http://schemas.openxmlformats.org/presentationml/2006/main">
+  <p:cSld>
+    <p:spTree>
+      <p:nvGrpSpPr>
+        <p:cNvPr id="1" name=""/>
+        <p:cNvGrpSpPr/>
+        <p:nvPr/>
+      </p:nvGrpSpPr>
+      <p:grpSpPr>
+        <a:xfrm>
+          <a:off x="0" y="0"/>
+          <a:ext cx="0" cy="0"/>
+          <a:chOff x="0" y="0"/>
+          <a:chExt cx="0" cy="0"/>
+        </a:xfrm>
+      </p:grpSpPr>
+      <p:sp>
+        <p:nvSpPr>
+          <p:cNvPr id="2" name="Slide Image Placeholder 1"/>
+          <p:cNvSpPr>
+            <a:spLocks noGrp="1" noRot="1" noChangeAspect="1"/>
+          </p:cNvSpPr>
+          <p:nvPr>
+            <p:ph type="sldImg"/>
+          </p:nvPr>
+        </p:nvSpPr>
+        <p:spPr/>
+      </p:sp>
+      <p:sp>
+        <p:nvSpPr>
+          <p:cNvPr id="3" name="Notes Placeholder 2"/>
+          <p:cNvSpPr>
+            <a:spLocks noGrp="1"/>
+          </p:cNvSpPr>
+          <p:nvPr>
+            <p:ph type="body" idx="1"/>
+          </p:nvPr>
+        </p:nvSpPr>
+        <p:spPr/>
+        <p:txBody>
+          <a:bodyPr/>
+          <a:lstStyle/>
+          <a:p>
+            <a:r>
+              <a:rPr lang="en-US" dirty="0"/>
+              <a:t/>
+            </a:r>
+            <a:endParaRPr lang="en-US" dirty="0"/>
+          </a:p>
+        </p:txBody>
+      </p:sp>
+      <p:sp>
+        <p:nvSpPr>
+          <p:cNvPr id="4" name="Slide Number Placeholder 3"/>
+          <p:cNvSpPr>
+            <a:spLocks noGrp="1"/>
+          </p:cNvSpPr>
+          <p:nvPr>
+            <p:ph type="sldNum" sz="quarter" idx="10"/>
+          </p:nvPr>
+        </p:nvSpPr>
+        <p:spPr/>
+        <p:txBody>
+          <a:bodyPr/>
+          <a:lstStyle/>
+          <a:p>
+            <a:fld id="{F7021451-1387-4CA6-816F-3879F97B5CBC}" type="slidenum">
+              <a:rPr lang="en-US"/>
+              <a:t>11</a:t>
             </a:fld>
             <a:endParaRPr lang="en-US"/>
           </a:p>
@@ -1876,102 +1965,6 @@
         </p:nvSpPr>
         <p:spPr>
           <a:xfrm>
-            <a:off x="406301" y="1223963"/>
-            <a:ext cx="8498026" cy="274290"/>
-          </a:xfrm>
-          <a:prstGeom prst="rect">
-            <a:avLst/>
-          </a:prstGeom>
-          <a:noFill/>
-          <a:ln/>
-        </p:spPr>
-        <p:txBody>
-          <a:bodyPr wrap="square" lIns="0" tIns="0" rIns="0" bIns="0" rtlCol="0" anchor="t"/>
-          <a:lstStyle/>
-          <a:p>
-            <a:pPr algn="l" indent="0" marL="0">
-              <a:lnSpc>
-                <a:spcPts val="2160"/>
-              </a:lnSpc>
-              <a:spcBef>
-                <a:spcPts val="600"/>
-              </a:spcBef>
-              <a:spcAft>
-                <a:spcPts val="800"/>
-              </a:spcAft>
-              <a:buNone/>
-            </a:pPr>
-            <a:r>
-              <a:rPr lang="en-US" sz="1800" b="1" dirty="0">
-                <a:solidFill>
-                  <a:srgbClr val="E07A5F"/>
-                </a:solidFill>
-                <a:latin typeface="Georgia" pitchFamily="34" charset="0"/>
-                <a:ea typeface="Georgia" pitchFamily="34" charset="-122"/>
-                <a:cs typeface="Georgia" pitchFamily="34" charset="-120"/>
-              </a:rPr>
-              <a:t>Goal</a:t>
-            </a:r>
-            <a:endParaRPr lang="en-US" sz="1800" dirty="0"/>
-          </a:p>
-        </p:txBody>
-      </p:sp>
-      <p:sp>
-        <p:nvSpPr>
-          <p:cNvPr id="6" name="Text 4"/>
-          <p:cNvSpPr/>
-          <p:nvPr/>
-        </p:nvSpPr>
-        <p:spPr>
-          <a:xfrm>
-            <a:off x="406301" y="1637854"/>
-            <a:ext cx="8498026" cy="213271"/>
-          </a:xfrm>
-          <a:prstGeom prst="rect">
-            <a:avLst/>
-          </a:prstGeom>
-          <a:noFill/>
-          <a:ln/>
-        </p:spPr>
-        <p:txBody>
-          <a:bodyPr wrap="square" lIns="0" tIns="0" rIns="0" bIns="0" rtlCol="0" anchor="t"/>
-          <a:lstStyle/>
-          <a:p>
-            <a:pPr algn="l" indent="0" marL="0">
-              <a:lnSpc>
-                <a:spcPts val="1680"/>
-              </a:lnSpc>
-              <a:spcBef>
-                <a:spcPts val="300"/>
-              </a:spcBef>
-              <a:spcAft>
-                <a:spcPts val="300"/>
-              </a:spcAft>
-              <a:buNone/>
-            </a:pPr>
-            <a:r>
-              <a:rPr lang="en-US" sz="1200" dirty="0">
-                <a:solidFill>
-                  <a:srgbClr val="2C2C2C"/>
-                </a:solidFill>
-                <a:latin typeface="Verdana" pitchFamily="34" charset="0"/>
-                <a:ea typeface="Verdana" pitchFamily="34" charset="-122"/>
-                <a:cs typeface="Verdana" pitchFamily="34" charset="-120"/>
-              </a:rPr>
-              <a:t>Each child finalises their invented pose, draws it, and names it.</a:t>
-            </a:r>
-            <a:endParaRPr lang="en-US" sz="1200" dirty="0"/>
-          </a:p>
-        </p:txBody>
-      </p:sp>
-      <p:sp>
-        <p:nvSpPr>
-          <p:cNvPr id="7" name="Text 5"/>
-          <p:cNvSpPr/>
-          <p:nvPr/>
-        </p:nvSpPr>
-        <p:spPr>
-          <a:xfrm>
             <a:off x="406301" y="4434929"/>
             <a:ext cx="8498026" cy="213271"/>
           </a:xfrm>
@@ -2116,7 +2109,7 @@
                 <a:ea typeface="Georgia" pitchFamily="34" charset="-122"/>
                 <a:cs typeface="Georgia" pitchFamily="34" charset="-120"/>
               </a:rPr>
-              <a:t>Teacher's quick notes</a:t>
+              <a:t>Differentiation</a:t>
             </a:r>
             <a:endParaRPr lang="en-US" sz="1800" dirty="0"/>
           </a:p>
@@ -2130,8 +2123,8 @@
         </p:nvSpPr>
         <p:spPr>
           <a:xfrm>
-            <a:off x="406301" y="870942"/>
-            <a:ext cx="8498026" cy="426541"/>
+            <a:off x="634901" y="883593"/>
+            <a:ext cx="8102798" cy="525661"/>
           </a:xfrm>
           <a:prstGeom prst="rect">
             <a:avLst/>
@@ -2143,13 +2136,31 @@
           <a:bodyPr wrap="square" lIns="0" tIns="0" rIns="0" bIns="0" rtlCol="0" anchor="t"/>
           <a:lstStyle/>
           <a:p>
+            <a:pPr algn="l" marL="342900" indent="-342900">
+              <a:lnSpc>
+                <a:spcPts val="1620"/>
+              </a:lnSpc>
+              <a:spcAft>
+                <a:spcPts val="300"/>
+              </a:spcAft>
+              <a:buSzPct val="100000"/>
+              <a:buChar char="•"/>
+            </a:pPr>
+            <a:r>
+              <a:rPr lang="en-US" sz="1200" b="1" dirty="0">
+                <a:solidFill>
+                  <a:srgbClr val="2C2C2C"/>
+                </a:solidFill>
+                <a:latin typeface="Verdana" pitchFamily="34" charset="0"/>
+                <a:ea typeface="Verdana" pitchFamily="34" charset="-122"/>
+                <a:cs typeface="Verdana" pitchFamily="34" charset="-120"/>
+              </a:rPr>
+              <a:t>Tier up:</a:t>
+            </a:r>
             <a:pPr algn="l" indent="0" marL="0">
               <a:lnSpc>
-                <a:spcPts val="1680"/>
+                <a:spcPts val="1620"/>
               </a:lnSpc>
-              <a:spcBef>
-                <a:spcPts val="300"/>
-              </a:spcBef>
               <a:spcAft>
                 <a:spcPts val="300"/>
               </a:spcAft>
@@ -2164,7 +2175,279 @@
                 <a:ea typeface="Verdana" pitchFamily="34" charset="-122"/>
                 <a:cs typeface="Verdana" pitchFamily="34" charset="-120"/>
               </a:rPr>
-              <a:t>– Confirm pose safety for every child. Redirect any unsafe poses now. – Some children will struggle to invent — let them adapt an existing pose with a new name.</a:t>
+              <a:t> Write 3 sentences of instructions for your pose.</a:t>
+            </a:r>
+            <a:endParaRPr lang="en-US" sz="1200" dirty="0"/>
+          </a:p>
+          <a:p>
+            <a:pPr algn="l" marL="342900" indent="-342900">
+              <a:lnSpc>
+                <a:spcPts val="1620"/>
+              </a:lnSpc>
+              <a:spcAft>
+                <a:spcPts val="300"/>
+              </a:spcAft>
+              <a:buSzPct val="100000"/>
+              <a:buChar char="•"/>
+            </a:pPr>
+            <a:r>
+              <a:rPr lang="en-US" sz="1200" b="1" dirty="0">
+                <a:solidFill>
+                  <a:srgbClr val="2C2C2C"/>
+                </a:solidFill>
+                <a:latin typeface="Verdana" pitchFamily="34" charset="0"/>
+                <a:ea typeface="Verdana" pitchFamily="34" charset="-122"/>
+                <a:cs typeface="Verdana" pitchFamily="34" charset="-120"/>
+              </a:rPr>
+              <a:t>Tier down:</a:t>
+            </a:r>
+            <a:pPr algn="l" indent="0" marL="0">
+              <a:lnSpc>
+                <a:spcPts val="1620"/>
+              </a:lnSpc>
+              <a:spcAft>
+                <a:spcPts val="300"/>
+              </a:spcAft>
+              <a:buNone/>
+            </a:pPr>
+            <a:r>
+              <a:rPr lang="en-US" sz="1200" dirty="0">
+                <a:solidFill>
+                  <a:srgbClr val="2C2C2C"/>
+                </a:solidFill>
+                <a:latin typeface="Verdana" pitchFamily="34" charset="0"/>
+                <a:ea typeface="Verdana" pitchFamily="34" charset="-122"/>
+                <a:cs typeface="Verdana" pitchFamily="34" charset="-120"/>
+              </a:rPr>
+              <a:t> Just a drawing + the name is enough.</a:t>
+            </a:r>
+            <a:endParaRPr lang="en-US" sz="1200" dirty="0"/>
+          </a:p>
+        </p:txBody>
+      </p:sp>
+      <p:sp>
+        <p:nvSpPr>
+          <p:cNvPr id="5" name="Text 3"/>
+          <p:cNvSpPr/>
+          <p:nvPr/>
+        </p:nvSpPr>
+        <p:spPr>
+          <a:xfrm>
+            <a:off x="406301" y="4434929"/>
+            <a:ext cx="8498026" cy="213271"/>
+          </a:xfrm>
+          <a:prstGeom prst="rect">
+            <a:avLst/>
+          </a:prstGeom>
+          <a:noFill/>
+          <a:ln/>
+        </p:spPr>
+        <p:txBody>
+          <a:bodyPr wrap="square" lIns="0" tIns="0" rIns="0" bIns="0" rtlCol="0" anchor="t"/>
+          <a:lstStyle/>
+          <a:p>
+            <a:pPr algn="l" indent="0" marL="0">
+              <a:lnSpc>
+                <a:spcPts val="1680"/>
+              </a:lnSpc>
+              <a:spcBef>
+                <a:spcPts val="300"/>
+              </a:spcBef>
+              <a:spcAft>
+                <a:spcPts val="300"/>
+              </a:spcAft>
+              <a:buNone/>
+            </a:pPr>
+            <a:r>
+              <a:rPr lang="en-US" sz="1200" dirty="0">
+                <a:solidFill>
+                  <a:srgbClr val="2C2C2C"/>
+                </a:solidFill>
+                <a:latin typeface="Verdana" pitchFamily="34" charset="0"/>
+                <a:ea typeface="Verdana" pitchFamily="34" charset="-122"/>
+                <a:cs typeface="Verdana" pitchFamily="34" charset="-120"/>
+              </a:rPr>
+              <a:t>Primary ·  · IKS Curriculum</a:t>
+            </a:r>
+            <a:endParaRPr lang="en-US" sz="1200" dirty="0"/>
+          </a:p>
+        </p:txBody>
+      </p:sp>
+    </p:spTree>
+  </p:cSld>
+  <p:clrMapOvr>
+    <a:masterClrMapping/>
+  </p:clrMapOvr>
+</p:sld>
+</file>
+
+<file path=ppt/slides/slide11.xml><?xml version="1.0" encoding="utf-8"?>
+<p:sld xmlns:a="http://schemas.openxmlformats.org/drawingml/2006/main" xmlns:r="http://schemas.openxmlformats.org/officeDocument/2006/relationships" xmlns:p="http://schemas.openxmlformats.org/presentationml/2006/main">
+  <p:cSld name="Slide 11">
+    <p:bg>
+      <p:bgPr>
+        <a:solidFill>
+          <a:srgbClr val="FAF7F2"/>
+        </a:solidFill>
+      </p:bgPr>
+    </p:bg>
+    <p:spTree>
+      <p:nvGrpSpPr>
+        <p:cNvPr id="1" name=""/>
+        <p:cNvGrpSpPr/>
+        <p:nvPr/>
+      </p:nvGrpSpPr>
+      <p:grpSpPr>
+        <a:xfrm>
+          <a:off x="0" y="0"/>
+          <a:ext cx="0" cy="0"/>
+          <a:chOff x="0" y="0"/>
+          <a:chExt cx="0" cy="0"/>
+        </a:xfrm>
+      </p:grpSpPr>
+      <p:sp>
+        <p:nvSpPr>
+          <p:cNvPr id="2" name="Text 0"/>
+          <p:cNvSpPr/>
+          <p:nvPr/>
+        </p:nvSpPr>
+        <p:spPr>
+          <a:xfrm>
+            <a:off x="0" y="0"/>
+            <a:ext cx="9144000" cy="101501"/>
+          </a:xfrm>
+          <a:prstGeom prst="rect">
+            <a:avLst/>
+          </a:prstGeom>
+          <a:solidFill>
+            <a:srgbClr val="87A96B"/>
+          </a:solidFill>
+          <a:ln/>
+        </p:spPr>
+        <p:txBody>
+          <a:bodyPr wrap="square" rtlCol="0" anchor="ctr"/>
+          <a:lstStyle/>
+          <a:p>
+            <a:pPr indent="0" marL="0">
+              <a:buNone/>
+            </a:pPr>
+            <a:endParaRPr lang="en-US" dirty="0"/>
+          </a:p>
+        </p:txBody>
+      </p:sp>
+      <p:sp>
+        <p:nvSpPr>
+          <p:cNvPr id="3" name="Text 1"/>
+          <p:cNvSpPr/>
+          <p:nvPr/>
+        </p:nvSpPr>
+        <p:spPr>
+          <a:xfrm>
+            <a:off x="406301" y="457051"/>
+            <a:ext cx="8498026" cy="274290"/>
+          </a:xfrm>
+          <a:prstGeom prst="rect">
+            <a:avLst/>
+          </a:prstGeom>
+          <a:noFill/>
+          <a:ln/>
+        </p:spPr>
+        <p:txBody>
+          <a:bodyPr wrap="square" lIns="0" tIns="0" rIns="0" bIns="0" rtlCol="0" anchor="t"/>
+          <a:lstStyle/>
+          <a:p>
+            <a:pPr algn="l" indent="0" marL="0">
+              <a:lnSpc>
+                <a:spcPts val="2160"/>
+              </a:lnSpc>
+              <a:spcBef>
+                <a:spcPts val="600"/>
+              </a:spcBef>
+              <a:spcAft>
+                <a:spcPts val="800"/>
+              </a:spcAft>
+              <a:buNone/>
+            </a:pPr>
+            <a:r>
+              <a:rPr lang="en-US" sz="1800" b="1" dirty="0">
+                <a:solidFill>
+                  <a:srgbClr val="E07A5F"/>
+                </a:solidFill>
+                <a:latin typeface="Georgia" pitchFamily="34" charset="0"/>
+                <a:ea typeface="Georgia" pitchFamily="34" charset="-122"/>
+                <a:cs typeface="Georgia" pitchFamily="34" charset="-120"/>
+              </a:rPr>
+              <a:t>Teacher's quick notes</a:t>
+            </a:r>
+            <a:endParaRPr lang="en-US" sz="1800" dirty="0"/>
+          </a:p>
+        </p:txBody>
+      </p:sp>
+      <p:sp>
+        <p:nvSpPr>
+          <p:cNvPr id="4" name="Text 2"/>
+          <p:cNvSpPr/>
+          <p:nvPr/>
+        </p:nvSpPr>
+        <p:spPr>
+          <a:xfrm>
+            <a:off x="634901" y="883593"/>
+            <a:ext cx="8102798" cy="525661"/>
+          </a:xfrm>
+          <a:prstGeom prst="rect">
+            <a:avLst/>
+          </a:prstGeom>
+          <a:noFill/>
+          <a:ln/>
+        </p:spPr>
+        <p:txBody>
+          <a:bodyPr wrap="square" lIns="0" tIns="0" rIns="0" bIns="0" rtlCol="0" anchor="t"/>
+          <a:lstStyle/>
+          <a:p>
+            <a:pPr algn="l" marL="342900" indent="-342900">
+              <a:lnSpc>
+                <a:spcPts val="1620"/>
+              </a:lnSpc>
+              <a:spcAft>
+                <a:spcPts val="300"/>
+              </a:spcAft>
+              <a:buSzPct val="100000"/>
+              <a:buChar char="•"/>
+            </a:pPr>
+            <a:r>
+              <a:rPr lang="en-US" sz="1200" dirty="0">
+                <a:solidFill>
+                  <a:srgbClr val="2C2C2C"/>
+                </a:solidFill>
+                <a:latin typeface="Verdana" pitchFamily="34" charset="0"/>
+                <a:ea typeface="Verdana" pitchFamily="34" charset="-122"/>
+                <a:cs typeface="Verdana" pitchFamily="34" charset="-120"/>
+              </a:rPr>
+              <a:t>Confirm pose safety for every child. Redirect any unsafe poses now.</a:t>
+            </a:r>
+            <a:endParaRPr lang="en-US" sz="1200" dirty="0"/>
+          </a:p>
+          <a:p>
+            <a:pPr algn="l" marL="342900" indent="-342900">
+              <a:lnSpc>
+                <a:spcPts val="1620"/>
+              </a:lnSpc>
+              <a:spcAft>
+                <a:spcPts val="300"/>
+              </a:spcAft>
+              <a:buSzPct val="100000"/>
+              <a:buChar char="•"/>
+            </a:pPr>
+            <a:r>
+              <a:rPr lang="en-US" sz="1200" dirty="0">
+                <a:solidFill>
+                  <a:srgbClr val="2C2C2C"/>
+                </a:solidFill>
+                <a:latin typeface="Verdana" pitchFamily="34" charset="0"/>
+                <a:ea typeface="Verdana" pitchFamily="34" charset="-122"/>
+                <a:cs typeface="Verdana" pitchFamily="34" charset="-120"/>
+              </a:rPr>
+              <a:t>Some children will struggle to invent — let them adapt an existing pose with a new name.</a:t>
             </a:r>
             <a:endParaRPr lang="en-US" sz="1200" dirty="0"/>
           </a:p>
@@ -2322,7 +2605,7 @@
                 <a:ea typeface="Georgia" pitchFamily="34" charset="-122"/>
                 <a:cs typeface="Georgia" pitchFamily="34" charset="-120"/>
               </a:rPr>
-              <a:t>Materials</a:t>
+              <a:t>Goal</a:t>
             </a:r>
             <a:endParaRPr lang="en-US" sz="1800" dirty="0"/>
           </a:p>
@@ -2370,7 +2653,7 @@
                 <a:ea typeface="Verdana" pitchFamily="34" charset="-122"/>
                 <a:cs typeface="Verdana" pitchFamily="34" charset="-120"/>
               </a:rPr>
-              <a:t>– Drawing paper + crayons – Mats</a:t>
+              <a:t>Each child finalises their invented pose, draws it, and names it.</a:t>
             </a:r>
             <a:endParaRPr lang="en-US" sz="1200" dirty="0"/>
           </a:p>
@@ -2528,7 +2811,7 @@
                 <a:ea typeface="Georgia" pitchFamily="34" charset="-122"/>
                 <a:cs typeface="Georgia" pitchFamily="34" charset="-120"/>
               </a:rPr>
-              <a:t>The flow</a:t>
+              <a:t>Materials</a:t>
             </a:r>
             <a:endParaRPr lang="en-US" sz="1800" dirty="0"/>
           </a:p>
@@ -2537,6 +2820,76 @@
       <p:sp>
         <p:nvSpPr>
           <p:cNvPr id="4" name="Text 2"/>
+          <p:cNvSpPr/>
+          <p:nvPr/>
+        </p:nvSpPr>
+        <p:spPr>
+          <a:xfrm>
+            <a:off x="634901" y="883593"/>
+            <a:ext cx="8102798" cy="525661"/>
+          </a:xfrm>
+          <a:prstGeom prst="rect">
+            <a:avLst/>
+          </a:prstGeom>
+          <a:noFill/>
+          <a:ln/>
+        </p:spPr>
+        <p:txBody>
+          <a:bodyPr wrap="square" lIns="0" tIns="0" rIns="0" bIns="0" rtlCol="0" anchor="t"/>
+          <a:lstStyle/>
+          <a:p>
+            <a:pPr algn="l" marL="342900" indent="-342900">
+              <a:lnSpc>
+                <a:spcPts val="1620"/>
+              </a:lnSpc>
+              <a:spcAft>
+                <a:spcPts val="300"/>
+              </a:spcAft>
+              <a:buSzPct val="100000"/>
+              <a:buChar char="•"/>
+            </a:pPr>
+            <a:r>
+              <a:rPr lang="en-US" sz="1200" dirty="0">
+                <a:solidFill>
+                  <a:srgbClr val="2C2C2C"/>
+                </a:solidFill>
+                <a:latin typeface="Verdana" pitchFamily="34" charset="0"/>
+                <a:ea typeface="Verdana" pitchFamily="34" charset="-122"/>
+                <a:cs typeface="Verdana" pitchFamily="34" charset="-120"/>
+              </a:rPr>
+              <a:t>Drawing paper + crayons</a:t>
+            </a:r>
+            <a:endParaRPr lang="en-US" sz="1200" dirty="0"/>
+          </a:p>
+          <a:p>
+            <a:pPr algn="l" marL="342900" indent="-342900">
+              <a:lnSpc>
+                <a:spcPts val="1620"/>
+              </a:lnSpc>
+              <a:spcAft>
+                <a:spcPts val="300"/>
+              </a:spcAft>
+              <a:buSzPct val="100000"/>
+              <a:buChar char="•"/>
+            </a:pPr>
+            <a:r>
+              <a:rPr lang="en-US" sz="1200" dirty="0">
+                <a:solidFill>
+                  <a:srgbClr val="2C2C2C"/>
+                </a:solidFill>
+                <a:latin typeface="Verdana" pitchFamily="34" charset="0"/>
+                <a:ea typeface="Verdana" pitchFamily="34" charset="-122"/>
+                <a:cs typeface="Verdana" pitchFamily="34" charset="-120"/>
+              </a:rPr>
+              <a:t>Mats</a:t>
+            </a:r>
+            <a:endParaRPr lang="en-US" sz="1200" dirty="0"/>
+          </a:p>
+        </p:txBody>
+      </p:sp>
+      <p:sp>
+        <p:nvSpPr>
+          <p:cNvPr id="5" name="Text 3"/>
           <p:cNvSpPr/>
           <p:nvPr/>
         </p:nvSpPr>
@@ -2686,7 +3039,7 @@
                 <a:ea typeface="Georgia" pitchFamily="34" charset="-122"/>
                 <a:cs typeface="Georgia" pitchFamily="34" charset="-120"/>
               </a:rPr>
-              <a:t>Settle + opening tāḍāsana (3 min)</a:t>
+              <a:t>The flow</a:t>
             </a:r>
             <a:endParaRPr lang="en-US" sz="1800" dirty="0"/>
           </a:p>
@@ -2844,7 +3197,7 @@
                 <a:ea typeface="Georgia" pitchFamily="34" charset="-122"/>
                 <a:cs typeface="Georgia" pitchFamily="34" charset="-120"/>
               </a:rPr>
-              <a:t>Project work (20 min)</a:t>
+              <a:t>Settle + opening tāḍāsana (3 min)</a:t>
             </a:r>
             <a:endParaRPr lang="en-US" sz="1800" dirty="0"/>
           </a:p>
@@ -2853,54 +3206,6 @@
       <p:sp>
         <p:nvSpPr>
           <p:cNvPr id="4" name="Text 2"/>
-          <p:cNvSpPr/>
-          <p:nvPr/>
-        </p:nvSpPr>
-        <p:spPr>
-          <a:xfrm>
-            <a:off x="406301" y="870942"/>
-            <a:ext cx="8498026" cy="426541"/>
-          </a:xfrm>
-          <a:prstGeom prst="rect">
-            <a:avLst/>
-          </a:prstGeom>
-          <a:noFill/>
-          <a:ln/>
-        </p:spPr>
-        <p:txBody>
-          <a:bodyPr wrap="square" lIns="0" tIns="0" rIns="0" bIns="0" rtlCol="0" anchor="t"/>
-          <a:lstStyle/>
-          <a:p>
-            <a:pPr algn="l" indent="0" marL="0">
-              <a:lnSpc>
-                <a:spcPts val="1680"/>
-              </a:lnSpc>
-              <a:spcBef>
-                <a:spcPts val="300"/>
-              </a:spcBef>
-              <a:spcAft>
-                <a:spcPts val="300"/>
-              </a:spcAft>
-              <a:buNone/>
-            </a:pPr>
-            <a:r>
-              <a:rPr lang="en-US" sz="1200" dirty="0">
-                <a:solidFill>
-                  <a:srgbClr val="2C2C2C"/>
-                </a:solidFill>
-                <a:latin typeface="Verdana" pitchFamily="34" charset="0"/>
-                <a:ea typeface="Verdana" pitchFamily="34" charset="-122"/>
-                <a:cs typeface="Verdana" pitchFamily="34" charset="-120"/>
-              </a:rPr>
-              <a:t>– Each child decides their final pose name. – Draws a clear picture of the pose. – Writes: pose name, what part of the body it stretches/strengthens. – Practises the pose 3 times.</a:t>
-            </a:r>
-            <a:endParaRPr lang="en-US" sz="1200" dirty="0"/>
-          </a:p>
-        </p:txBody>
-      </p:sp>
-      <p:sp>
-        <p:nvSpPr>
-          <p:cNvPr id="5" name="Text 3"/>
           <p:cNvSpPr/>
           <p:nvPr/>
         </p:nvSpPr>
@@ -3050,7 +3355,7 @@
                 <a:ea typeface="Georgia" pitchFamily="34" charset="-122"/>
                 <a:cs typeface="Georgia" pitchFamily="34" charset="-120"/>
               </a:rPr>
-              <a:t>Buddy check (5 min)</a:t>
+              <a:t>Project work (20 min)</a:t>
             </a:r>
             <a:endParaRPr lang="en-US" sz="1800" dirty="0"/>
           </a:p>
@@ -3064,8 +3369,8 @@
         </p:nvSpPr>
         <p:spPr>
           <a:xfrm>
-            <a:off x="406301" y="870942"/>
-            <a:ext cx="8498026" cy="213271"/>
+            <a:off x="634901" y="883593"/>
+            <a:ext cx="8102798" cy="1013222"/>
           </a:xfrm>
           <a:prstGeom prst="rect">
             <a:avLst/>
@@ -3077,17 +3382,15 @@
           <a:bodyPr wrap="square" lIns="0" tIns="0" rIns="0" bIns="0" rtlCol="0" anchor="t"/>
           <a:lstStyle/>
           <a:p>
-            <a:pPr algn="l" indent="0" marL="0">
+            <a:pPr algn="l" marL="342900" indent="-342900">
               <a:lnSpc>
-                <a:spcPts val="1680"/>
+                <a:spcPts val="1620"/>
               </a:lnSpc>
-              <a:spcBef>
-                <a:spcPts val="300"/>
-              </a:spcBef>
               <a:spcAft>
                 <a:spcPts val="300"/>
               </a:spcAft>
-              <a:buNone/>
+              <a:buSzPct val="100000"/>
+              <a:buChar char="•"/>
             </a:pPr>
             <a:r>
               <a:rPr lang="en-US" sz="1200" dirty="0">
@@ -3098,7 +3401,79 @@
                 <a:ea typeface="Verdana" pitchFamily="34" charset="-122"/>
                 <a:cs typeface="Verdana" pitchFamily="34" charset="-120"/>
               </a:rPr>
-              <a:t>– Find a partner. Show your pose. Partner tries it. Partner says ONE thing that worked.</a:t>
+              <a:t>Each child decides their final pose name.</a:t>
+            </a:r>
+            <a:endParaRPr lang="en-US" sz="1200" dirty="0"/>
+          </a:p>
+          <a:p>
+            <a:pPr algn="l" marL="342900" indent="-342900">
+              <a:lnSpc>
+                <a:spcPts val="1620"/>
+              </a:lnSpc>
+              <a:spcAft>
+                <a:spcPts val="300"/>
+              </a:spcAft>
+              <a:buSzPct val="100000"/>
+              <a:buChar char="•"/>
+            </a:pPr>
+            <a:r>
+              <a:rPr lang="en-US" sz="1200" dirty="0">
+                <a:solidFill>
+                  <a:srgbClr val="2C2C2C"/>
+                </a:solidFill>
+                <a:latin typeface="Verdana" pitchFamily="34" charset="0"/>
+                <a:ea typeface="Verdana" pitchFamily="34" charset="-122"/>
+                <a:cs typeface="Verdana" pitchFamily="34" charset="-120"/>
+              </a:rPr>
+              <a:t>Draws a clear picture of the pose.</a:t>
+            </a:r>
+            <a:endParaRPr lang="en-US" sz="1200" dirty="0"/>
+          </a:p>
+          <a:p>
+            <a:pPr algn="l" marL="342900" indent="-342900">
+              <a:lnSpc>
+                <a:spcPts val="1620"/>
+              </a:lnSpc>
+              <a:spcAft>
+                <a:spcPts val="300"/>
+              </a:spcAft>
+              <a:buSzPct val="100000"/>
+              <a:buChar char="•"/>
+            </a:pPr>
+            <a:r>
+              <a:rPr lang="en-US" sz="1200" dirty="0">
+                <a:solidFill>
+                  <a:srgbClr val="2C2C2C"/>
+                </a:solidFill>
+                <a:latin typeface="Verdana" pitchFamily="34" charset="0"/>
+                <a:ea typeface="Verdana" pitchFamily="34" charset="-122"/>
+                <a:cs typeface="Verdana" pitchFamily="34" charset="-120"/>
+              </a:rPr>
+              <a:t>Writes: pose name, what part of the body it stretches/strengthens.</a:t>
+            </a:r>
+            <a:endParaRPr lang="en-US" sz="1200" dirty="0"/>
+          </a:p>
+          <a:p>
+            <a:pPr algn="l" marL="342900" indent="-342900">
+              <a:lnSpc>
+                <a:spcPts val="1620"/>
+              </a:lnSpc>
+              <a:spcAft>
+                <a:spcPts val="300"/>
+              </a:spcAft>
+              <a:buSzPct val="100000"/>
+              <a:buChar char="•"/>
+            </a:pPr>
+            <a:r>
+              <a:rPr lang="en-US" sz="1200" dirty="0">
+                <a:solidFill>
+                  <a:srgbClr val="2C2C2C"/>
+                </a:solidFill>
+                <a:latin typeface="Verdana" pitchFamily="34" charset="0"/>
+                <a:ea typeface="Verdana" pitchFamily="34" charset="-122"/>
+                <a:cs typeface="Verdana" pitchFamily="34" charset="-120"/>
+              </a:rPr>
+              <a:t>Practises the pose 3 times.</a:t>
             </a:r>
             <a:endParaRPr lang="en-US" sz="1200" dirty="0"/>
           </a:p>
@@ -3256,7 +3631,7 @@
                 <a:ea typeface="Georgia" pitchFamily="34" charset="-122"/>
                 <a:cs typeface="Georgia" pitchFamily="34" charset="-120"/>
               </a:rPr>
-              <a:t>Close (2 min)</a:t>
+              <a:t>Buddy check (5 min)</a:t>
             </a:r>
             <a:endParaRPr lang="en-US" sz="1800" dirty="0"/>
           </a:p>
@@ -3270,8 +3645,8 @@
         </p:nvSpPr>
         <p:spPr>
           <a:xfrm>
-            <a:off x="406301" y="870942"/>
-            <a:ext cx="8498026" cy="213271"/>
+            <a:off x="634901" y="883593"/>
+            <a:ext cx="8102798" cy="281880"/>
           </a:xfrm>
           <a:prstGeom prst="rect">
             <a:avLst/>
@@ -3283,17 +3658,15 @@
           <a:bodyPr wrap="square" lIns="0" tIns="0" rIns="0" bIns="0" rtlCol="0" anchor="t"/>
           <a:lstStyle/>
           <a:p>
-            <a:pPr algn="l" indent="0" marL="0">
+            <a:pPr algn="l" marL="342900" indent="-342900">
               <a:lnSpc>
-                <a:spcPts val="1680"/>
+                <a:spcPts val="1620"/>
               </a:lnSpc>
-              <a:spcBef>
-                <a:spcPts val="300"/>
-              </a:spcBef>
               <a:spcAft>
                 <a:spcPts val="300"/>
               </a:spcAft>
-              <a:buNone/>
+              <a:buSzPct val="100000"/>
+              <a:buChar char="•"/>
             </a:pPr>
             <a:r>
               <a:rPr lang="en-US" sz="1200" dirty="0">
@@ -3304,7 +3677,7 @@
                 <a:ea typeface="Verdana" pitchFamily="34" charset="-122"/>
                 <a:cs typeface="Verdana" pitchFamily="34" charset="-120"/>
               </a:rPr>
-              <a:t>Tāḍāsana. Namaste.</a:t>
+              <a:t>Find a partner. Show your pose. Partner tries it. Partner says ONE thing that worked.</a:t>
             </a:r>
             <a:endParaRPr lang="en-US" sz="1200" dirty="0"/>
           </a:p>
@@ -3462,7 +3835,7 @@
                 <a:ea typeface="Georgia" pitchFamily="34" charset="-122"/>
                 <a:cs typeface="Georgia" pitchFamily="34" charset="-120"/>
               </a:rPr>
-              <a:t>Homework</a:t>
+              <a:t>Close (2 min)</a:t>
             </a:r>
             <a:endParaRPr lang="en-US" sz="1800" dirty="0"/>
           </a:p>
@@ -3510,7 +3883,7 @@
                 <a:ea typeface="Verdana" pitchFamily="34" charset="-122"/>
                 <a:cs typeface="Verdana" pitchFamily="34" charset="-120"/>
               </a:rPr>
-              <a:t>– Practise teaching your pose to a parent at home. Get them to try it!</a:t>
+              <a:t>Tāḍāsana. Namaste.</a:t>
             </a:r>
             <a:endParaRPr lang="en-US" sz="1200" dirty="0"/>
           </a:p>
@@ -3668,7 +4041,7 @@
                 <a:ea typeface="Georgia" pitchFamily="34" charset="-122"/>
                 <a:cs typeface="Georgia" pitchFamily="34" charset="-120"/>
               </a:rPr>
-              <a:t>Differentiation</a:t>
+              <a:t>Homework</a:t>
             </a:r>
             <a:endParaRPr lang="en-US" sz="1800" dirty="0"/>
           </a:p>
@@ -3683,7 +4056,7 @@
         <p:spPr>
           <a:xfrm>
             <a:off x="634901" y="883593"/>
-            <a:ext cx="8102798" cy="525661"/>
+            <a:ext cx="8102798" cy="281880"/>
           </a:xfrm>
           <a:prstGeom prst="rect">
             <a:avLst/>
@@ -3704,26 +4077,6 @@
               </a:spcAft>
               <a:buSzPct val="100000"/>
               <a:buChar char="•"/>
-            </a:pPr>
-            <a:r>
-              <a:rPr lang="en-US" sz="1200" b="1" dirty="0">
-                <a:solidFill>
-                  <a:srgbClr val="2C2C2C"/>
-                </a:solidFill>
-                <a:latin typeface="Verdana" pitchFamily="34" charset="0"/>
-                <a:ea typeface="Verdana" pitchFamily="34" charset="-122"/>
-                <a:cs typeface="Verdana" pitchFamily="34" charset="-120"/>
-              </a:rPr>
-              <a:t>Tier up:</a:t>
-            </a:r>
-            <a:pPr algn="l" indent="0" marL="0">
-              <a:lnSpc>
-                <a:spcPts val="1620"/>
-              </a:lnSpc>
-              <a:spcAft>
-                <a:spcPts val="300"/>
-              </a:spcAft>
-              <a:buNone/>
             </a:pPr>
             <a:r>
               <a:rPr lang="en-US" sz="1200" dirty="0">
@@ -3734,51 +4087,7 @@
                 <a:ea typeface="Verdana" pitchFamily="34" charset="-122"/>
                 <a:cs typeface="Verdana" pitchFamily="34" charset="-120"/>
               </a:rPr>
-              <a:t> Write 3 sentences of instructions for your pose.</a:t>
-            </a:r>
-            <a:endParaRPr lang="en-US" sz="1200" dirty="0"/>
-          </a:p>
-          <a:p>
-            <a:pPr algn="l" marL="342900" indent="-342900">
-              <a:lnSpc>
-                <a:spcPts val="1620"/>
-              </a:lnSpc>
-              <a:spcAft>
-                <a:spcPts val="300"/>
-              </a:spcAft>
-              <a:buSzPct val="100000"/>
-              <a:buChar char="•"/>
-            </a:pPr>
-            <a:r>
-              <a:rPr lang="en-US" sz="1200" b="1" dirty="0">
-                <a:solidFill>
-                  <a:srgbClr val="2C2C2C"/>
-                </a:solidFill>
-                <a:latin typeface="Verdana" pitchFamily="34" charset="0"/>
-                <a:ea typeface="Verdana" pitchFamily="34" charset="-122"/>
-                <a:cs typeface="Verdana" pitchFamily="34" charset="-120"/>
-              </a:rPr>
-              <a:t>Tier down:</a:t>
-            </a:r>
-            <a:pPr algn="l" indent="0" marL="0">
-              <a:lnSpc>
-                <a:spcPts val="1620"/>
-              </a:lnSpc>
-              <a:spcAft>
-                <a:spcPts val="300"/>
-              </a:spcAft>
-              <a:buNone/>
-            </a:pPr>
-            <a:r>
-              <a:rPr lang="en-US" sz="1200" dirty="0">
-                <a:solidFill>
-                  <a:srgbClr val="2C2C2C"/>
-                </a:solidFill>
-                <a:latin typeface="Verdana" pitchFamily="34" charset="0"/>
-                <a:ea typeface="Verdana" pitchFamily="34" charset="-122"/>
-                <a:cs typeface="Verdana" pitchFamily="34" charset="-120"/>
-              </a:rPr>
-              <a:t> Just a drawing + the name is enough.</a:t>
+              <a:t>Practise teaching your pose to a parent at home. Get them to try it!</a:t>
             </a:r>
             <a:endParaRPr lang="en-US" sz="1200" dirty="0"/>
           </a:p>
